--- a/_part_4/_figures/401-frequentistische-inferenz.pptx
+++ b/_part_4/_figures/401-frequentistische-inferenz.pptx
@@ -243,7 +243,7 @@
           <a:p>
             <a:fld id="{6AC0B27E-A263-45D8-A3A3-5C00D0A59E1B}" type="datetimeFigureOut">
               <a:rPr lang="de-DE" smtClean="0"/>
-              <a:t>26.12.2023</a:t>
+              <a:t>07.12.2025</a:t>
             </a:fld>
             <a:endParaRPr lang="de-DE"/>
           </a:p>
@@ -413,7 +413,7 @@
           <a:p>
             <a:fld id="{6AC0B27E-A263-45D8-A3A3-5C00D0A59E1B}" type="datetimeFigureOut">
               <a:rPr lang="de-DE" smtClean="0"/>
-              <a:t>26.12.2023</a:t>
+              <a:t>07.12.2025</a:t>
             </a:fld>
             <a:endParaRPr lang="de-DE"/>
           </a:p>
@@ -593,7 +593,7 @@
           <a:p>
             <a:fld id="{6AC0B27E-A263-45D8-A3A3-5C00D0A59E1B}" type="datetimeFigureOut">
               <a:rPr lang="de-DE" smtClean="0"/>
-              <a:t>26.12.2023</a:t>
+              <a:t>07.12.2025</a:t>
             </a:fld>
             <a:endParaRPr lang="de-DE"/>
           </a:p>
@@ -763,7 +763,7 @@
           <a:p>
             <a:fld id="{6AC0B27E-A263-45D8-A3A3-5C00D0A59E1B}" type="datetimeFigureOut">
               <a:rPr lang="de-DE" smtClean="0"/>
-              <a:t>26.12.2023</a:t>
+              <a:t>07.12.2025</a:t>
             </a:fld>
             <a:endParaRPr lang="de-DE"/>
           </a:p>
@@ -1009,7 +1009,7 @@
           <a:p>
             <a:fld id="{6AC0B27E-A263-45D8-A3A3-5C00D0A59E1B}" type="datetimeFigureOut">
               <a:rPr lang="de-DE" smtClean="0"/>
-              <a:t>26.12.2023</a:t>
+              <a:t>07.12.2025</a:t>
             </a:fld>
             <a:endParaRPr lang="de-DE"/>
           </a:p>
@@ -1241,7 +1241,7 @@
           <a:p>
             <a:fld id="{6AC0B27E-A263-45D8-A3A3-5C00D0A59E1B}" type="datetimeFigureOut">
               <a:rPr lang="de-DE" smtClean="0"/>
-              <a:t>26.12.2023</a:t>
+              <a:t>07.12.2025</a:t>
             </a:fld>
             <a:endParaRPr lang="de-DE"/>
           </a:p>
@@ -1608,7 +1608,7 @@
           <a:p>
             <a:fld id="{6AC0B27E-A263-45D8-A3A3-5C00D0A59E1B}" type="datetimeFigureOut">
               <a:rPr lang="de-DE" smtClean="0"/>
-              <a:t>26.12.2023</a:t>
+              <a:t>07.12.2025</a:t>
             </a:fld>
             <a:endParaRPr lang="de-DE"/>
           </a:p>
@@ -1726,7 +1726,7 @@
           <a:p>
             <a:fld id="{6AC0B27E-A263-45D8-A3A3-5C00D0A59E1B}" type="datetimeFigureOut">
               <a:rPr lang="de-DE" smtClean="0"/>
-              <a:t>26.12.2023</a:t>
+              <a:t>07.12.2025</a:t>
             </a:fld>
             <a:endParaRPr lang="de-DE"/>
           </a:p>
@@ -1821,7 +1821,7 @@
           <a:p>
             <a:fld id="{6AC0B27E-A263-45D8-A3A3-5C00D0A59E1B}" type="datetimeFigureOut">
               <a:rPr lang="de-DE" smtClean="0"/>
-              <a:t>26.12.2023</a:t>
+              <a:t>07.12.2025</a:t>
             </a:fld>
             <a:endParaRPr lang="de-DE"/>
           </a:p>
@@ -2098,7 +2098,7 @@
           <a:p>
             <a:fld id="{6AC0B27E-A263-45D8-A3A3-5C00D0A59E1B}" type="datetimeFigureOut">
               <a:rPr lang="de-DE" smtClean="0"/>
-              <a:t>26.12.2023</a:t>
+              <a:t>07.12.2025</a:t>
             </a:fld>
             <a:endParaRPr lang="de-DE"/>
           </a:p>
@@ -2355,7 +2355,7 @@
           <a:p>
             <a:fld id="{6AC0B27E-A263-45D8-A3A3-5C00D0A59E1B}" type="datetimeFigureOut">
               <a:rPr lang="de-DE" smtClean="0"/>
-              <a:t>26.12.2023</a:t>
+              <a:t>07.12.2025</a:t>
             </a:fld>
             <a:endParaRPr lang="de-DE"/>
           </a:p>
@@ -2568,7 +2568,7 @@
           <a:p>
             <a:fld id="{6AC0B27E-A263-45D8-A3A3-5C00D0A59E1B}" type="datetimeFigureOut">
               <a:rPr lang="de-DE" smtClean="0"/>
-              <a:t>26.12.2023</a:t>
+              <a:t>07.12.2025</a:t>
             </a:fld>
             <a:endParaRPr lang="de-DE"/>
           </a:p>
@@ -3025,7 +3025,11 @@
           <a:lstStyle/>
           <a:p>
             <a:pPr algn="ctr"/>
-            <a:endParaRPr lang="en-GB"/>
+            <a:endParaRPr lang="en-GB">
+              <a:latin typeface="CMU Bright" panose="02000603000000000000" pitchFamily="2" charset="0"/>
+              <a:ea typeface="CMU Bright" panose="02000603000000000000" pitchFamily="2" charset="0"/>
+              <a:cs typeface="CMU Bright" panose="02000603000000000000" pitchFamily="2" charset="0"/>
+            </a:endParaRPr>
           </a:p>
         </p:txBody>
       </p:sp>
@@ -3213,8 +3217,8 @@
           </a:p>
         </p:txBody>
       </p:sp>
-      <mc:AlternateContent xmlns:mc="http://schemas.openxmlformats.org/markup-compatibility/2006" xmlns:a14="http://schemas.microsoft.com/office/drawing/2010/main">
-        <mc:Choice Requires="a14">
+      <mc:AlternateContent xmlns:mc="http://schemas.openxmlformats.org/markup-compatibility/2006">
+        <mc:Choice xmlns:a14="http://schemas.microsoft.com/office/drawing/2010/main" Requires="a14">
           <p:sp>
             <p:nvSpPr>
               <p:cNvPr id="9" name="Textfeld 8">
@@ -3271,7 +3275,7 @@
             </p:txBody>
           </p:sp>
         </mc:Choice>
-        <mc:Fallback xmlns="">
+        <mc:Fallback>
           <p:sp>
             <p:nvSpPr>
               <p:cNvPr id="9" name="Textfeld 8">
@@ -3373,8 +3377,8 @@
           </a:p>
         </p:txBody>
       </p:sp>
-      <mc:AlternateContent xmlns:mc="http://schemas.openxmlformats.org/markup-compatibility/2006" xmlns:a14="http://schemas.microsoft.com/office/drawing/2010/main">
-        <mc:Choice Requires="a14">
+      <mc:AlternateContent xmlns:mc="http://schemas.openxmlformats.org/markup-compatibility/2006">
+        <mc:Choice xmlns:a14="http://schemas.microsoft.com/office/drawing/2010/main" Requires="a14">
           <p:sp>
             <p:nvSpPr>
               <p:cNvPr id="11" name="Textfeld 10">
@@ -3428,7 +3432,7 @@
             </p:txBody>
           </p:sp>
         </mc:Choice>
-        <mc:Fallback xmlns="">
+        <mc:Fallback>
           <p:sp>
             <p:nvSpPr>
               <p:cNvPr id="11" name="Textfeld 10">
@@ -3567,8 +3571,8 @@
           </a:fontRef>
         </p:style>
       </p:cxnSp>
-      <mc:AlternateContent xmlns:mc="http://schemas.openxmlformats.org/markup-compatibility/2006" xmlns:a14="http://schemas.microsoft.com/office/drawing/2010/main">
-        <mc:Choice Requires="a14">
+      <mc:AlternateContent xmlns:mc="http://schemas.openxmlformats.org/markup-compatibility/2006">
+        <mc:Choice xmlns:a14="http://schemas.microsoft.com/office/drawing/2010/main" Requires="a14">
           <p:sp>
             <p:nvSpPr>
               <p:cNvPr id="15" name="Textfeld 14">
@@ -3625,7 +3629,7 @@
             </p:txBody>
           </p:sp>
         </mc:Choice>
-        <mc:Fallback xmlns="">
+        <mc:Fallback>
           <p:sp>
             <p:nvSpPr>
               <p:cNvPr id="15" name="Textfeld 14">
@@ -3732,8 +3736,8 @@
           </a:p>
         </p:txBody>
       </p:sp>
-      <mc:AlternateContent xmlns:mc="http://schemas.openxmlformats.org/markup-compatibility/2006" xmlns:a14="http://schemas.microsoft.com/office/drawing/2010/main">
-        <mc:Choice Requires="a14">
+      <mc:AlternateContent xmlns:mc="http://schemas.openxmlformats.org/markup-compatibility/2006">
+        <mc:Choice xmlns:a14="http://schemas.microsoft.com/office/drawing/2010/main" Requires="a14">
           <p:sp>
             <p:nvSpPr>
               <p:cNvPr id="17" name="Textfeld 16">
@@ -3799,7 +3803,7 @@
             </p:txBody>
           </p:sp>
         </mc:Choice>
-        <mc:Fallback xmlns="">
+        <mc:Fallback>
           <p:sp>
             <p:nvSpPr>
               <p:cNvPr id="17" name="Textfeld 16">
@@ -3859,7 +3863,7 @@
         <p:spPr>
           <a:xfrm>
             <a:off x="6151122" y="913163"/>
-            <a:ext cx="1415259" cy="323165"/>
+            <a:ext cx="1495922" cy="323165"/>
           </a:xfrm>
           <a:prstGeom prst="rect">
             <a:avLst/>
@@ -3944,8 +3948,8 @@
           </a:p>
         </p:txBody>
       </p:sp>
-      <mc:AlternateContent xmlns:mc="http://schemas.openxmlformats.org/markup-compatibility/2006" xmlns:a14="http://schemas.microsoft.com/office/drawing/2010/main">
-        <mc:Choice Requires="a14">
+      <mc:AlternateContent xmlns:mc="http://schemas.openxmlformats.org/markup-compatibility/2006">
+        <mc:Choice xmlns:a14="http://schemas.microsoft.com/office/drawing/2010/main" Requires="a14">
           <p:sp>
             <p:nvSpPr>
               <p:cNvPr id="21" name="Textfeld 20">
@@ -4002,7 +4006,7 @@
             </p:txBody>
           </p:sp>
         </mc:Choice>
-        <mc:Fallback xmlns="">
+        <mc:Fallback>
           <p:sp>
             <p:nvSpPr>
               <p:cNvPr id="21" name="Textfeld 20">
@@ -4109,8 +4113,8 @@
           </a:p>
         </p:txBody>
       </p:sp>
-      <mc:AlternateContent xmlns:mc="http://schemas.openxmlformats.org/markup-compatibility/2006" xmlns:a14="http://schemas.microsoft.com/office/drawing/2010/main">
-        <mc:Choice Requires="a14">
+      <mc:AlternateContent xmlns:mc="http://schemas.openxmlformats.org/markup-compatibility/2006">
+        <mc:Choice xmlns:a14="http://schemas.microsoft.com/office/drawing/2010/main" Requires="a14">
           <p:sp>
             <p:nvSpPr>
               <p:cNvPr id="23" name="Textfeld 22">
@@ -4188,7 +4192,7 @@
             </p:txBody>
           </p:sp>
         </mc:Choice>
-        <mc:Fallback xmlns="">
+        <mc:Fallback>
           <p:sp>
             <p:nvSpPr>
               <p:cNvPr id="23" name="Textfeld 22">
@@ -4333,8 +4337,8 @@
           </a:p>
         </p:txBody>
       </p:sp>
-      <mc:AlternateContent xmlns:mc="http://schemas.openxmlformats.org/markup-compatibility/2006" xmlns:a14="http://schemas.microsoft.com/office/drawing/2010/main">
-        <mc:Choice Requires="a14">
+      <mc:AlternateContent xmlns:mc="http://schemas.openxmlformats.org/markup-compatibility/2006">
+        <mc:Choice xmlns:a14="http://schemas.microsoft.com/office/drawing/2010/main" Requires="a14">
           <p:sp>
             <p:nvSpPr>
               <p:cNvPr id="26" name="Textfeld 25">
@@ -4385,7 +4389,7 @@
             </p:txBody>
           </p:sp>
         </mc:Choice>
-        <mc:Fallback xmlns="">
+        <mc:Fallback>
           <p:sp>
             <p:nvSpPr>
               <p:cNvPr id="26" name="Textfeld 25">
@@ -4430,8 +4434,8 @@
           </p:sp>
         </mc:Fallback>
       </mc:AlternateContent>
-      <mc:AlternateContent xmlns:mc="http://schemas.openxmlformats.org/markup-compatibility/2006" xmlns:a14="http://schemas.microsoft.com/office/drawing/2010/main">
-        <mc:Choice Requires="a14">
+      <mc:AlternateContent xmlns:mc="http://schemas.openxmlformats.org/markup-compatibility/2006">
+        <mc:Choice xmlns:a14="http://schemas.microsoft.com/office/drawing/2010/main" Requires="a14">
           <p:sp>
             <p:nvSpPr>
               <p:cNvPr id="28" name="Textfeld 27">
@@ -4488,7 +4492,7 @@
             </p:txBody>
           </p:sp>
         </mc:Choice>
-        <mc:Fallback xmlns="">
+        <mc:Fallback>
           <p:sp>
             <p:nvSpPr>
               <p:cNvPr id="28" name="Textfeld 27">
@@ -4638,8 +4642,8 @@
           </a:p>
         </p:txBody>
       </p:sp>
-      <mc:AlternateContent xmlns:mc="http://schemas.openxmlformats.org/markup-compatibility/2006" xmlns:a14="http://schemas.microsoft.com/office/drawing/2010/main">
-        <mc:Choice Requires="a14">
+      <mc:AlternateContent xmlns:mc="http://schemas.openxmlformats.org/markup-compatibility/2006">
+        <mc:Choice xmlns:a14="http://schemas.microsoft.com/office/drawing/2010/main" Requires="a14">
           <p:sp>
             <p:nvSpPr>
               <p:cNvPr id="36" name="Textfeld 35">
@@ -4698,7 +4702,7 @@
             </p:txBody>
           </p:sp>
         </mc:Choice>
-        <mc:Fallback xmlns="">
+        <mc:Fallback>
           <p:sp>
             <p:nvSpPr>
               <p:cNvPr id="36" name="Textfeld 35">
@@ -4743,8 +4747,8 @@
           </p:sp>
         </mc:Fallback>
       </mc:AlternateContent>
-      <mc:AlternateContent xmlns:mc="http://schemas.openxmlformats.org/markup-compatibility/2006" xmlns:a14="http://schemas.microsoft.com/office/drawing/2010/main">
-        <mc:Choice Requires="a14">
+      <mc:AlternateContent xmlns:mc="http://schemas.openxmlformats.org/markup-compatibility/2006">
+        <mc:Choice xmlns:a14="http://schemas.microsoft.com/office/drawing/2010/main" Requires="a14">
           <p:sp>
             <p:nvSpPr>
               <p:cNvPr id="37" name="Textfeld 36">
@@ -4820,7 +4824,7 @@
             </p:txBody>
           </p:sp>
         </mc:Choice>
-        <mc:Fallback xmlns="">
+        <mc:Fallback>
           <p:sp>
             <p:nvSpPr>
               <p:cNvPr id="37" name="Textfeld 36">
@@ -4846,7 +4850,7 @@
               <a:blipFill>
                 <a:blip r:embed="rId11"/>
                 <a:stretch>
-                  <a:fillRect l="-10909" r="-5455" b="-13333"/>
+                  <a:fillRect l="-10909" r="-3636" b="-13333"/>
                 </a:stretch>
               </a:blipFill>
             </p:spPr>
@@ -4865,8 +4869,8 @@
           </p:sp>
         </mc:Fallback>
       </mc:AlternateContent>
-      <mc:AlternateContent xmlns:mc="http://schemas.openxmlformats.org/markup-compatibility/2006" xmlns:a14="http://schemas.microsoft.com/office/drawing/2010/main">
-        <mc:Choice Requires="a14">
+      <mc:AlternateContent xmlns:mc="http://schemas.openxmlformats.org/markup-compatibility/2006">
+        <mc:Choice xmlns:a14="http://schemas.microsoft.com/office/drawing/2010/main" Requires="a14">
           <p:sp>
             <p:nvSpPr>
               <p:cNvPr id="38" name="Textfeld 37">
@@ -4942,7 +4946,7 @@
             </p:txBody>
           </p:sp>
         </mc:Choice>
-        <mc:Fallback xmlns="">
+        <mc:Fallback>
           <p:sp>
             <p:nvSpPr>
               <p:cNvPr id="38" name="Textfeld 37">
@@ -4987,8 +4991,8 @@
           </p:sp>
         </mc:Fallback>
       </mc:AlternateContent>
-      <mc:AlternateContent xmlns:mc="http://schemas.openxmlformats.org/markup-compatibility/2006" xmlns:a14="http://schemas.microsoft.com/office/drawing/2010/main">
-        <mc:Choice Requires="a14">
+      <mc:AlternateContent xmlns:mc="http://schemas.openxmlformats.org/markup-compatibility/2006">
+        <mc:Choice xmlns:a14="http://schemas.microsoft.com/office/drawing/2010/main" Requires="a14">
           <p:sp>
             <p:nvSpPr>
               <p:cNvPr id="39" name="Rechteck 38">
@@ -5065,7 +5069,7 @@
             </p:txBody>
           </p:sp>
         </mc:Choice>
-        <mc:Fallback xmlns="">
+        <mc:Fallback>
           <p:sp>
             <p:nvSpPr>
               <p:cNvPr id="39" name="Rechteck 38">
@@ -5110,8 +5114,8 @@
           </p:sp>
         </mc:Fallback>
       </mc:AlternateContent>
-      <mc:AlternateContent xmlns:mc="http://schemas.openxmlformats.org/markup-compatibility/2006" xmlns:a14="http://schemas.microsoft.com/office/drawing/2010/main">
-        <mc:Choice Requires="a14">
+      <mc:AlternateContent xmlns:mc="http://schemas.openxmlformats.org/markup-compatibility/2006">
+        <mc:Choice xmlns:a14="http://schemas.microsoft.com/office/drawing/2010/main" Requires="a14">
           <p:sp>
             <p:nvSpPr>
               <p:cNvPr id="40" name="Rechteck 39">
@@ -5249,7 +5253,7 @@
             </p:txBody>
           </p:sp>
         </mc:Choice>
-        <mc:Fallback xmlns="">
+        <mc:Fallback>
           <p:sp>
             <p:nvSpPr>
               <p:cNvPr id="40" name="Rechteck 39">
@@ -5294,8 +5298,8 @@
           </p:sp>
         </mc:Fallback>
       </mc:AlternateContent>
-      <mc:AlternateContent xmlns:mc="http://schemas.openxmlformats.org/markup-compatibility/2006" xmlns:a14="http://schemas.microsoft.com/office/drawing/2010/main">
-        <mc:Choice Requires="a14">
+      <mc:AlternateContent xmlns:mc="http://schemas.openxmlformats.org/markup-compatibility/2006">
+        <mc:Choice xmlns:a14="http://schemas.microsoft.com/office/drawing/2010/main" Requires="a14">
           <p:sp>
             <p:nvSpPr>
               <p:cNvPr id="41" name="Rechteck 40">
@@ -5428,7 +5432,7 @@
             </p:txBody>
           </p:sp>
         </mc:Choice>
-        <mc:Fallback xmlns="">
+        <mc:Fallback>
           <p:sp>
             <p:nvSpPr>
               <p:cNvPr id="41" name="Rechteck 40">
@@ -5635,8 +5639,8 @@
           </a:p>
         </p:txBody>
       </p:sp>
-      <mc:AlternateContent xmlns:mc="http://schemas.openxmlformats.org/markup-compatibility/2006" xmlns:a14="http://schemas.microsoft.com/office/drawing/2010/main">
-        <mc:Choice Requires="a14">
+      <mc:AlternateContent xmlns:mc="http://schemas.openxmlformats.org/markup-compatibility/2006">
+        <mc:Choice xmlns:a14="http://schemas.microsoft.com/office/drawing/2010/main" Requires="a14">
           <p:sp>
             <p:nvSpPr>
               <p:cNvPr id="2" name="Textfeld 1">
@@ -5749,12 +5753,16 @@
                     </m:oMath>
                   </m:oMathPara>
                 </a14:m>
-                <a:endParaRPr lang="en-GB" sz="1500" dirty="0"/>
+                <a:endParaRPr lang="en-GB" sz="1500" dirty="0">
+                  <a:latin typeface="CMU Bright" panose="02000603000000000000" pitchFamily="2" charset="0"/>
+                  <a:ea typeface="CMU Bright" panose="02000603000000000000" pitchFamily="2" charset="0"/>
+                  <a:cs typeface="CMU Bright" panose="02000603000000000000" pitchFamily="2" charset="0"/>
+                </a:endParaRPr>
               </a:p>
             </p:txBody>
           </p:sp>
         </mc:Choice>
-        <mc:Fallback xmlns="">
+        <mc:Fallback>
           <p:sp>
             <p:nvSpPr>
               <p:cNvPr id="2" name="Textfeld 1">
@@ -5780,7 +5788,7 @@
               <a:blipFill>
                 <a:blip r:embed="rId16"/>
                 <a:stretch>
-                  <a:fillRect b="-11321"/>
+                  <a:fillRect b="-9434"/>
                 </a:stretch>
               </a:blipFill>
             </p:spPr>
@@ -6018,8 +6026,8 @@
           </a:fontRef>
         </p:style>
       </p:cxnSp>
-      <mc:AlternateContent xmlns:mc="http://schemas.openxmlformats.org/markup-compatibility/2006" xmlns:a14="http://schemas.microsoft.com/office/drawing/2010/main">
-        <mc:Choice Requires="a14">
+      <mc:AlternateContent xmlns:mc="http://schemas.openxmlformats.org/markup-compatibility/2006">
+        <mc:Choice xmlns:a14="http://schemas.microsoft.com/office/drawing/2010/main" Requires="a14">
           <p:sp>
             <p:nvSpPr>
               <p:cNvPr id="52" name="Rechteck 51">
@@ -6035,7 +6043,7 @@
             <p:spPr>
               <a:xfrm>
                 <a:off x="2986188" y="2632077"/>
-                <a:ext cx="610360" cy="446276"/>
+                <a:ext cx="640816" cy="446276"/>
               </a:xfrm>
               <a:prstGeom prst="rect">
                 <a:avLst/>
@@ -6082,12 +6090,16 @@
                     </m:oMath>
                   </m:oMathPara>
                 </a14:m>
-                <a:endParaRPr lang="en-GB" sz="2300" dirty="0"/>
+                <a:endParaRPr lang="en-GB" sz="2300" dirty="0">
+                  <a:latin typeface="CMU Bright" panose="02000603000000000000" pitchFamily="2" charset="0"/>
+                  <a:ea typeface="CMU Bright" panose="02000603000000000000" pitchFamily="2" charset="0"/>
+                  <a:cs typeface="CMU Bright" panose="02000603000000000000" pitchFamily="2" charset="0"/>
+                </a:endParaRPr>
               </a:p>
             </p:txBody>
           </p:sp>
         </mc:Choice>
-        <mc:Fallback xmlns="">
+        <mc:Fallback>
           <p:sp>
             <p:nvSpPr>
               <p:cNvPr id="52" name="Rechteck 51">
@@ -6105,7 +6117,7 @@
             <p:spPr>
               <a:xfrm>
                 <a:off x="2986188" y="2632077"/>
-                <a:ext cx="610360" cy="446276"/>
+                <a:ext cx="640816" cy="446276"/>
               </a:xfrm>
               <a:prstGeom prst="rect">
                 <a:avLst/>
@@ -6113,7 +6125,7 @@
               <a:blipFill>
                 <a:blip r:embed="rId17"/>
                 <a:stretch>
-                  <a:fillRect b="-2740"/>
+                  <a:fillRect/>
                 </a:stretch>
               </a:blipFill>
             </p:spPr>
